--- a/presentation/first_review_v2.pptx
+++ b/presentation/first_review_v2.pptx
@@ -533,7 +533,7 @@
           <a:lstStyle/>
           <a:p>
             <a:r>
-              <a:t>We built the working system for this paper: the trained model, the explanation layer on top of it, and the results. The writing, the framing and where it gets submitted are your call. We'll go through the data, the network layer by layer, what came out, what broke along the way, and what we think should happen next. Every number on these slides comes from the saved runs.</a:t>
+              <a:t>The project is called ARC-CXR, for audited radiograph classification. We built the working system for this paper: the trained model, the explanation layer on top of it, and the results. The writing, the framing and where it gets submitted are your call. We'll go through the data, the network layer by layer, what came out, what broke along the way, and what we think should happen next. Every number on these slides comes from the saved runs.</a:t>
             </a:r>
           </a:p>
         </p:txBody>
@@ -5844,7 +5844,7 @@
                 </a:solidFill>
                 <a:latin typeface="Calibri"/>
               </a:rPr>
-              <a:t>Explainable chest X-ray classification</a:t>
+              <a:t>ARC-CXR</a:t>
             </a:r>
             <a:endParaRPr sz="4600"/>
           </a:p>
@@ -5887,7 +5887,7 @@
                 </a:solidFill>
                 <a:latin typeface="Calibri"/>
               </a:rPr>
-              <a:t>A DenseNet-121 trained on NIH ChestX-ray14, and three tests of whether its explanations can be trusted</a:t>
+              <a:t>Audited explanations for chest X-ray classification. A DenseNet-121 trained on NIH ChestX-ray14, and three tests of whether its explanations can be trusted.</a:t>
             </a:r>
             <a:endParaRPr sz="2200"/>
           </a:p>

--- a/presentation/first_review_v2.pptx
+++ b/presentation/first_review_v2.pptx
@@ -1233,7 +1233,7 @@
           <a:lstStyle/>
           <a:p>
             <a:r>
-              <a:t>We run several methods because they rest on different assumptions and fail in different ways. CAM is exact for this network. Grad-CAM and Grad-CAM++ are what most medical imaging papers use. EigenCAM uses no gradients and ignores which finding you ask about, so it points at the same place whatever the question. The random map is the control: if it also does well on a test, the test proves nothing. Three more methods are written and unit-tested but not yet scored, so we don't report them.</a:t>
+              <a:t>We run several methods because they rest on different assumptions and fail in different ways. CAM is exact for this network. Grad-CAM and Grad-CAM++ are what most medical imaging papers use. EigenCAM uses no gradients and ignores which finding you ask about, so it points at the same place whatever the question. The random map is the control: if it also does well on a test, the test proves nothing. Three more methods are written, two of them with unit tests, but not yet scored, so we don't report them.</a:t>
             </a:r>
           </a:p>
         </p:txBody>
@@ -5930,7 +5930,7 @@
                 </a:solidFill>
                 <a:latin typeface="Calibri"/>
               </a:rPr>
-              <a:t>Prepared by [team names] for [mentor name]</a:t>
+              <a:t>Prepared by group 132 for Dr. Raghvendra Mishra</a:t>
             </a:r>
             <a:endParaRPr sz="1400"/>
           </a:p>
@@ -25394,7 +25394,7 @@
                 </a:solidFill>
                 <a:latin typeface="Calibri"/>
               </a:rPr>
-              <a:t>All five give a 16 × 16 map, stretched to the size of the image. Score-CAM, Integrated Gradients and occlusion are written and unit-tested, but not scored yet.</a:t>
+              <a:t>All five give a 16 × 16 map, stretched to the size of the image. Score-CAM, Integrated Gradients and occlusion are written but not scored yet.</a:t>
             </a:r>
             <a:endParaRPr sz="1300"/>
           </a:p>
